--- a/ProyectoFinal_PresentacionIntermedia.pptx
+++ b/ProyectoFinal_PresentacionIntermedia.pptx
@@ -1357,6 +1357,13 @@
           </a:solidFill>
           <a:ln/>
         </p:spPr>
+        <p:txBody>
+          <a:bodyPr/>
+          <a:lstStyle/>
+          <a:p>
+            <a:endParaRPr lang="es-ES"/>
+          </a:p>
+        </p:txBody>
       </p:sp>
       <p:sp>
         <p:nvSpPr>
@@ -1492,6 +1499,13 @@
             <a:prstDash val="solid"/>
           </a:ln>
         </p:spPr>
+        <p:txBody>
+          <a:bodyPr/>
+          <a:lstStyle/>
+          <a:p>
+            <a:endParaRPr lang="es-ES"/>
+          </a:p>
+        </p:txBody>
       </p:sp>
       <p:sp>
         <p:nvSpPr>
@@ -1555,6 +1569,13 @@
             <a:prstDash val="solid"/>
           </a:ln>
         </p:spPr>
+        <p:txBody>
+          <a:bodyPr/>
+          <a:lstStyle/>
+          <a:p>
+            <a:endParaRPr lang="es-ES"/>
+          </a:p>
+        </p:txBody>
       </p:sp>
       <p:sp>
         <p:nvSpPr>
@@ -1618,6 +1639,13 @@
             <a:prstDash val="solid"/>
           </a:ln>
         </p:spPr>
+        <p:txBody>
+          <a:bodyPr/>
+          <a:lstStyle/>
+          <a:p>
+            <a:endParaRPr lang="es-ES"/>
+          </a:p>
+        </p:txBody>
       </p:sp>
       <p:sp>
         <p:nvSpPr>
@@ -1681,6 +1709,13 @@
             <a:prstDash val="solid"/>
           </a:ln>
         </p:spPr>
+        <p:txBody>
+          <a:bodyPr/>
+          <a:lstStyle/>
+          <a:p>
+            <a:endParaRPr lang="es-ES"/>
+          </a:p>
+        </p:txBody>
       </p:sp>
       <p:sp>
         <p:nvSpPr>
@@ -1744,6 +1779,13 @@
             <a:prstDash val="solid"/>
           </a:ln>
         </p:spPr>
+        <p:txBody>
+          <a:bodyPr/>
+          <a:lstStyle/>
+          <a:p>
+            <a:endParaRPr lang="es-ES"/>
+          </a:p>
+        </p:txBody>
       </p:sp>
       <p:sp>
         <p:nvSpPr>
@@ -1905,6 +1947,13 @@
           </a:solidFill>
           <a:ln/>
         </p:spPr>
+        <p:txBody>
+          <a:bodyPr/>
+          <a:lstStyle/>
+          <a:p>
+            <a:endParaRPr lang="es-ES"/>
+          </a:p>
+        </p:txBody>
       </p:sp>
       <p:sp>
         <p:nvSpPr>
@@ -1937,6 +1986,13 @@
             </a:outerShdw>
           </a:effectLst>
         </p:spPr>
+        <p:txBody>
+          <a:bodyPr/>
+          <a:lstStyle/>
+          <a:p>
+            <a:endParaRPr lang="es-ES"/>
+          </a:p>
+        </p:txBody>
       </p:sp>
       <p:sp>
         <p:nvSpPr>
@@ -1957,6 +2013,13 @@
           </a:solidFill>
           <a:ln/>
         </p:spPr>
+        <p:txBody>
+          <a:bodyPr/>
+          <a:lstStyle/>
+          <a:p>
+            <a:endParaRPr lang="es-ES"/>
+          </a:p>
+        </p:txBody>
       </p:sp>
       <p:sp>
         <p:nvSpPr>
@@ -2097,6 +2160,13 @@
             </a:outerShdw>
           </a:effectLst>
         </p:spPr>
+        <p:txBody>
+          <a:bodyPr/>
+          <a:lstStyle/>
+          <a:p>
+            <a:endParaRPr lang="es-ES"/>
+          </a:p>
+        </p:txBody>
       </p:sp>
       <p:sp>
         <p:nvSpPr>
@@ -2117,6 +2187,13 @@
           </a:solidFill>
           <a:ln/>
         </p:spPr>
+        <p:txBody>
+          <a:bodyPr/>
+          <a:lstStyle/>
+          <a:p>
+            <a:endParaRPr lang="es-ES"/>
+          </a:p>
+        </p:txBody>
       </p:sp>
       <p:sp>
         <p:nvSpPr>
@@ -2257,6 +2334,13 @@
             </a:outerShdw>
           </a:effectLst>
         </p:spPr>
+        <p:txBody>
+          <a:bodyPr/>
+          <a:lstStyle/>
+          <a:p>
+            <a:endParaRPr lang="es-ES"/>
+          </a:p>
+        </p:txBody>
       </p:sp>
       <p:sp>
         <p:nvSpPr>
@@ -2277,6 +2361,13 @@
           </a:solidFill>
           <a:ln/>
         </p:spPr>
+        <p:txBody>
+          <a:bodyPr/>
+          <a:lstStyle/>
+          <a:p>
+            <a:endParaRPr lang="es-ES"/>
+          </a:p>
+        </p:txBody>
       </p:sp>
       <p:sp>
         <p:nvSpPr>
@@ -2417,6 +2508,13 @@
             </a:outerShdw>
           </a:effectLst>
         </p:spPr>
+        <p:txBody>
+          <a:bodyPr/>
+          <a:lstStyle/>
+          <a:p>
+            <a:endParaRPr lang="es-ES"/>
+          </a:p>
+        </p:txBody>
       </p:sp>
       <p:sp>
         <p:nvSpPr>
@@ -2437,6 +2535,13 @@
           </a:solidFill>
           <a:ln/>
         </p:spPr>
+        <p:txBody>
+          <a:bodyPr/>
+          <a:lstStyle/>
+          <a:p>
+            <a:endParaRPr lang="es-ES"/>
+          </a:p>
+        </p:txBody>
       </p:sp>
       <p:sp>
         <p:nvSpPr>
@@ -2577,6 +2682,13 @@
             </a:outerShdw>
           </a:effectLst>
         </p:spPr>
+        <p:txBody>
+          <a:bodyPr/>
+          <a:lstStyle/>
+          <a:p>
+            <a:endParaRPr lang="es-ES"/>
+          </a:p>
+        </p:txBody>
       </p:sp>
       <p:sp>
         <p:nvSpPr>
@@ -2597,6 +2709,13 @@
           </a:solidFill>
           <a:ln/>
         </p:spPr>
+        <p:txBody>
+          <a:bodyPr/>
+          <a:lstStyle/>
+          <a:p>
+            <a:endParaRPr lang="es-ES"/>
+          </a:p>
+        </p:txBody>
       </p:sp>
       <p:sp>
         <p:nvSpPr>
@@ -2737,6 +2856,13 @@
             </a:outerShdw>
           </a:effectLst>
         </p:spPr>
+        <p:txBody>
+          <a:bodyPr/>
+          <a:lstStyle/>
+          <a:p>
+            <a:endParaRPr lang="es-ES"/>
+          </a:p>
+        </p:txBody>
       </p:sp>
       <p:sp>
         <p:nvSpPr>
@@ -2757,6 +2883,13 @@
           </a:solidFill>
           <a:ln/>
         </p:spPr>
+        <p:txBody>
+          <a:bodyPr/>
+          <a:lstStyle/>
+          <a:p>
+            <a:endParaRPr lang="es-ES"/>
+          </a:p>
+        </p:txBody>
       </p:sp>
       <p:sp>
         <p:nvSpPr>
@@ -2918,6 +3051,13 @@
           </a:solidFill>
           <a:ln/>
         </p:spPr>
+        <p:txBody>
+          <a:bodyPr/>
+          <a:lstStyle/>
+          <a:p>
+            <a:endParaRPr lang="es-ES"/>
+          </a:p>
+        </p:txBody>
       </p:sp>
       <p:sp>
         <p:nvSpPr>
@@ -2986,6 +3126,13 @@
             </a:outerShdw>
           </a:effectLst>
         </p:spPr>
+        <p:txBody>
+          <a:bodyPr/>
+          <a:lstStyle/>
+          <a:p>
+            <a:endParaRPr lang="es-ES"/>
+          </a:p>
+        </p:txBody>
       </p:sp>
       <p:sp>
         <p:nvSpPr>
@@ -3118,6 +3265,13 @@
             </a:outerShdw>
           </a:effectLst>
         </p:spPr>
+        <p:txBody>
+          <a:bodyPr/>
+          <a:lstStyle/>
+          <a:p>
+            <a:endParaRPr lang="es-ES"/>
+          </a:p>
+        </p:txBody>
       </p:sp>
       <p:sp>
         <p:nvSpPr>
@@ -3222,6 +3376,13 @@
             </a:outerShdw>
           </a:effectLst>
         </p:spPr>
+        <p:txBody>
+          <a:bodyPr/>
+          <a:lstStyle/>
+          <a:p>
+            <a:endParaRPr lang="es-ES"/>
+          </a:p>
+        </p:txBody>
       </p:sp>
       <p:sp>
         <p:nvSpPr>
@@ -3347,6 +3508,13 @@
           </a:solidFill>
           <a:ln/>
         </p:spPr>
+        <p:txBody>
+          <a:bodyPr/>
+          <a:lstStyle/>
+          <a:p>
+            <a:endParaRPr lang="es-ES"/>
+          </a:p>
+        </p:txBody>
       </p:sp>
       <p:sp>
         <p:nvSpPr>
@@ -3415,6 +3583,13 @@
             </a:outerShdw>
           </a:effectLst>
         </p:spPr>
+        <p:txBody>
+          <a:bodyPr/>
+          <a:lstStyle/>
+          <a:p>
+            <a:endParaRPr lang="es-ES"/>
+          </a:p>
+        </p:txBody>
       </p:sp>
       <p:sp>
         <p:nvSpPr>
@@ -3471,6 +3646,13 @@
           </a:solidFill>
           <a:ln/>
         </p:spPr>
+        <p:txBody>
+          <a:bodyPr/>
+          <a:lstStyle/>
+          <a:p>
+            <a:endParaRPr lang="es-ES"/>
+          </a:p>
+        </p:txBody>
       </p:sp>
       <p:sp>
         <p:nvSpPr>
@@ -3527,6 +3709,13 @@
           </a:solidFill>
           <a:ln/>
         </p:spPr>
+        <p:txBody>
+          <a:bodyPr/>
+          <a:lstStyle/>
+          <a:p>
+            <a:endParaRPr lang="es-ES"/>
+          </a:p>
+        </p:txBody>
       </p:sp>
       <p:sp>
         <p:nvSpPr>
@@ -3583,6 +3772,13 @@
           </a:solidFill>
           <a:ln/>
         </p:spPr>
+        <p:txBody>
+          <a:bodyPr/>
+          <a:lstStyle/>
+          <a:p>
+            <a:endParaRPr lang="es-ES"/>
+          </a:p>
+        </p:txBody>
       </p:sp>
       <p:sp>
         <p:nvSpPr>
@@ -3639,6 +3835,13 @@
           </a:solidFill>
           <a:ln/>
         </p:spPr>
+        <p:txBody>
+          <a:bodyPr/>
+          <a:lstStyle/>
+          <a:p>
+            <a:endParaRPr lang="es-ES"/>
+          </a:p>
+        </p:txBody>
       </p:sp>
       <p:sp>
         <p:nvSpPr>
@@ -3707,6 +3910,13 @@
             </a:outerShdw>
           </a:effectLst>
         </p:spPr>
+        <p:txBody>
+          <a:bodyPr/>
+          <a:lstStyle/>
+          <a:p>
+            <a:endParaRPr lang="es-ES"/>
+          </a:p>
+        </p:txBody>
       </p:sp>
       <p:sp>
         <p:nvSpPr>
@@ -3768,6 +3978,13 @@
             <a:prstDash val="solid"/>
           </a:ln>
         </p:spPr>
+        <p:txBody>
+          <a:bodyPr/>
+          <a:lstStyle/>
+          <a:p>
+            <a:endParaRPr lang="es-ES"/>
+          </a:p>
+        </p:txBody>
       </p:sp>
       <p:sp>
         <p:nvSpPr>
@@ -3865,6 +4082,13 @@
             <a:prstDash val="solid"/>
           </a:ln>
         </p:spPr>
+        <p:txBody>
+          <a:bodyPr/>
+          <a:lstStyle/>
+          <a:p>
+            <a:endParaRPr lang="es-ES"/>
+          </a:p>
+        </p:txBody>
       </p:sp>
       <p:sp>
         <p:nvSpPr>
@@ -3962,6 +4186,13 @@
             <a:prstDash val="solid"/>
           </a:ln>
         </p:spPr>
+        <p:txBody>
+          <a:bodyPr/>
+          <a:lstStyle/>
+          <a:p>
+            <a:endParaRPr lang="es-ES"/>
+          </a:p>
+        </p:txBody>
       </p:sp>
       <p:sp>
         <p:nvSpPr>
@@ -4059,6 +4290,13 @@
             <a:prstDash val="solid"/>
           </a:ln>
         </p:spPr>
+        <p:txBody>
+          <a:bodyPr/>
+          <a:lstStyle/>
+          <a:p>
+            <a:endParaRPr lang="es-ES"/>
+          </a:p>
+        </p:txBody>
       </p:sp>
       <p:sp>
         <p:nvSpPr>
@@ -4090,7 +4328,7 @@
                   <a:srgbClr val="1E3A5F"/>
                 </a:solidFill>
               </a:rPr>
-              <a:t>Sevilla</a:t>
+              <a:t>Zaragoza</a:t>
             </a:r>
             <a:endParaRPr lang="en-US" sz="1100" dirty="0"/>
           </a:p>
@@ -4117,18 +4355,10 @@
           <a:bodyPr wrap="square" lIns="0" tIns="0" rIns="0" bIns="0" rtlCol="0" anchor="ctr"/>
           <a:lstStyle/>
           <a:p>
-            <a:pPr marL="0" indent="0">
-              <a:buNone/>
-            </a:pPr>
-            <a:r>
-              <a:rPr lang="en-US" sz="800" dirty="0">
-                <a:solidFill>
-                  <a:srgbClr val="64748B"/>
-                </a:solidFill>
-              </a:rPr>
-              <a:t>37.39°N  5.99°O</a:t>
-            </a:r>
-            <a:endParaRPr lang="en-US" sz="800" dirty="0"/>
+            <a:r>
+              <a:rPr lang="es-ES" sz="800" dirty="0"/>
+              <a:t>41.65°N 0.88°O</a:t>
+            </a:r>
           </a:p>
         </p:txBody>
       </p:sp>
@@ -4163,6 +4393,13 @@
             </a:outerShdw>
           </a:effectLst>
         </p:spPr>
+        <p:txBody>
+          <a:bodyPr/>
+          <a:lstStyle/>
+          <a:p>
+            <a:endParaRPr lang="es-ES"/>
+          </a:p>
+        </p:txBody>
       </p:sp>
       <p:sp>
         <p:nvSpPr>
@@ -4432,6 +4669,13 @@
           </a:solidFill>
           <a:ln/>
         </p:spPr>
+        <p:txBody>
+          <a:bodyPr/>
+          <a:lstStyle/>
+          <a:p>
+            <a:endParaRPr lang="es-ES"/>
+          </a:p>
+        </p:txBody>
       </p:sp>
       <p:sp>
         <p:nvSpPr>
@@ -4500,6 +4744,13 @@
             </a:outerShdw>
           </a:effectLst>
         </p:spPr>
+        <p:txBody>
+          <a:bodyPr/>
+          <a:lstStyle/>
+          <a:p>
+            <a:endParaRPr lang="es-ES"/>
+          </a:p>
+        </p:txBody>
       </p:sp>
       <p:sp>
         <p:nvSpPr>
@@ -4787,6 +5038,13 @@
             </a:outerShdw>
           </a:effectLst>
         </p:spPr>
+        <p:txBody>
+          <a:bodyPr/>
+          <a:lstStyle/>
+          <a:p>
+            <a:endParaRPr lang="es-ES"/>
+          </a:p>
+        </p:txBody>
       </p:sp>
       <p:sp>
         <p:nvSpPr>
@@ -4940,6 +5198,13 @@
             </a:outerShdw>
           </a:effectLst>
         </p:spPr>
+        <p:txBody>
+          <a:bodyPr/>
+          <a:lstStyle/>
+          <a:p>
+            <a:endParaRPr lang="es-ES"/>
+          </a:p>
+        </p:txBody>
       </p:sp>
       <p:sp>
         <p:nvSpPr>
@@ -5069,6 +5334,13 @@
           </a:solidFill>
           <a:ln/>
         </p:spPr>
+        <p:txBody>
+          <a:bodyPr/>
+          <a:lstStyle/>
+          <a:p>
+            <a:endParaRPr lang="es-ES"/>
+          </a:p>
+        </p:txBody>
       </p:sp>
       <p:sp>
         <p:nvSpPr>
@@ -5158,6 +5430,13 @@
           </a:solidFill>
           <a:ln/>
         </p:spPr>
+        <p:txBody>
+          <a:bodyPr/>
+          <a:lstStyle/>
+          <a:p>
+            <a:endParaRPr lang="es-ES"/>
+          </a:p>
+        </p:txBody>
       </p:sp>
       <p:sp>
         <p:nvSpPr>
@@ -5221,6 +5500,13 @@
             </a:outerShdw>
           </a:effectLst>
         </p:spPr>
+        <p:txBody>
+          <a:bodyPr/>
+          <a:lstStyle/>
+          <a:p>
+            <a:endParaRPr lang="es-ES"/>
+          </a:p>
+        </p:txBody>
       </p:sp>
       <p:sp>
         <p:nvSpPr>
@@ -5327,6 +5613,13 @@
           </a:solidFill>
           <a:ln/>
         </p:spPr>
+        <p:txBody>
+          <a:bodyPr/>
+          <a:lstStyle/>
+          <a:p>
+            <a:endParaRPr lang="es-ES"/>
+          </a:p>
+        </p:txBody>
       </p:sp>
       <p:sp>
         <p:nvSpPr>
@@ -5390,6 +5683,13 @@
             </a:outerShdw>
           </a:effectLst>
         </p:spPr>
+        <p:txBody>
+          <a:bodyPr/>
+          <a:lstStyle/>
+          <a:p>
+            <a:endParaRPr lang="es-ES"/>
+          </a:p>
+        </p:txBody>
       </p:sp>
       <p:sp>
         <p:nvSpPr>
@@ -5496,6 +5796,13 @@
           </a:solidFill>
           <a:ln/>
         </p:spPr>
+        <p:txBody>
+          <a:bodyPr/>
+          <a:lstStyle/>
+          <a:p>
+            <a:endParaRPr lang="es-ES"/>
+          </a:p>
+        </p:txBody>
       </p:sp>
       <p:sp>
         <p:nvSpPr>
@@ -5559,6 +5866,13 @@
             </a:outerShdw>
           </a:effectLst>
         </p:spPr>
+        <p:txBody>
+          <a:bodyPr/>
+          <a:lstStyle/>
+          <a:p>
+            <a:endParaRPr lang="es-ES"/>
+          </a:p>
+        </p:txBody>
       </p:sp>
       <p:sp>
         <p:nvSpPr>
@@ -5665,6 +5979,13 @@
           </a:solidFill>
           <a:ln/>
         </p:spPr>
+        <p:txBody>
+          <a:bodyPr/>
+          <a:lstStyle/>
+          <a:p>
+            <a:endParaRPr lang="es-ES"/>
+          </a:p>
+        </p:txBody>
       </p:sp>
       <p:sp>
         <p:nvSpPr>
@@ -5728,6 +6049,13 @@
             </a:outerShdw>
           </a:effectLst>
         </p:spPr>
+        <p:txBody>
+          <a:bodyPr/>
+          <a:lstStyle/>
+          <a:p>
+            <a:endParaRPr lang="es-ES"/>
+          </a:p>
+        </p:txBody>
       </p:sp>
       <p:sp>
         <p:nvSpPr>
@@ -5834,6 +6162,13 @@
           </a:solidFill>
           <a:ln/>
         </p:spPr>
+        <p:txBody>
+          <a:bodyPr/>
+          <a:lstStyle/>
+          <a:p>
+            <a:endParaRPr lang="es-ES"/>
+          </a:p>
+        </p:txBody>
       </p:sp>
       <p:sp>
         <p:nvSpPr>
@@ -5897,6 +6232,13 @@
             </a:outerShdw>
           </a:effectLst>
         </p:spPr>
+        <p:txBody>
+          <a:bodyPr/>
+          <a:lstStyle/>
+          <a:p>
+            <a:endParaRPr lang="es-ES"/>
+          </a:p>
+        </p:txBody>
       </p:sp>
       <p:sp>
         <p:nvSpPr>
@@ -6003,6 +6345,13 @@
           </a:solidFill>
           <a:ln/>
         </p:spPr>
+        <p:txBody>
+          <a:bodyPr/>
+          <a:lstStyle/>
+          <a:p>
+            <a:endParaRPr lang="es-ES"/>
+          </a:p>
+        </p:txBody>
       </p:sp>
       <p:sp>
         <p:nvSpPr>
@@ -6066,6 +6415,13 @@
             </a:outerShdw>
           </a:effectLst>
         </p:spPr>
+        <p:txBody>
+          <a:bodyPr/>
+          <a:lstStyle/>
+          <a:p>
+            <a:endParaRPr lang="es-ES"/>
+          </a:p>
+        </p:txBody>
       </p:sp>
       <p:sp>
         <p:nvSpPr>
@@ -6537,6 +6893,13 @@
             <a:prstDash val="solid"/>
           </a:ln>
         </p:spPr>
+        <p:txBody>
+          <a:bodyPr/>
+          <a:lstStyle/>
+          <a:p>
+            <a:endParaRPr lang="es-ES"/>
+          </a:p>
+        </p:txBody>
       </p:sp>
       <p:sp>
         <p:nvSpPr>
@@ -6662,6 +7025,13 @@
           </a:solidFill>
           <a:ln/>
         </p:spPr>
+        <p:txBody>
+          <a:bodyPr/>
+          <a:lstStyle/>
+          <a:p>
+            <a:endParaRPr lang="es-ES"/>
+          </a:p>
+        </p:txBody>
       </p:sp>
       <p:sp>
         <p:nvSpPr>
@@ -6730,6 +7100,13 @@
             </a:outerShdw>
           </a:effectLst>
         </p:spPr>
+        <p:txBody>
+          <a:bodyPr/>
+          <a:lstStyle/>
+          <a:p>
+            <a:endParaRPr lang="es-ES"/>
+          </a:p>
+        </p:txBody>
       </p:sp>
       <p:sp>
         <p:nvSpPr>
@@ -6750,6 +7127,13 @@
           </a:solidFill>
           <a:ln/>
         </p:spPr>
+        <p:txBody>
+          <a:bodyPr/>
+          <a:lstStyle/>
+          <a:p>
+            <a:endParaRPr lang="es-ES"/>
+          </a:p>
+        </p:txBody>
       </p:sp>
       <p:sp>
         <p:nvSpPr>
@@ -6890,6 +7274,13 @@
             </a:outerShdw>
           </a:effectLst>
         </p:spPr>
+        <p:txBody>
+          <a:bodyPr/>
+          <a:lstStyle/>
+          <a:p>
+            <a:endParaRPr lang="es-ES"/>
+          </a:p>
+        </p:txBody>
       </p:sp>
       <p:sp>
         <p:nvSpPr>
@@ -6910,6 +7301,13 @@
           </a:solidFill>
           <a:ln/>
         </p:spPr>
+        <p:txBody>
+          <a:bodyPr/>
+          <a:lstStyle/>
+          <a:p>
+            <a:endParaRPr lang="es-ES"/>
+          </a:p>
+        </p:txBody>
       </p:sp>
       <p:sp>
         <p:nvSpPr>
@@ -7050,6 +7448,13 @@
             </a:outerShdw>
           </a:effectLst>
         </p:spPr>
+        <p:txBody>
+          <a:bodyPr/>
+          <a:lstStyle/>
+          <a:p>
+            <a:endParaRPr lang="es-ES"/>
+          </a:p>
+        </p:txBody>
       </p:sp>
       <p:sp>
         <p:nvSpPr>
@@ -7070,6 +7475,13 @@
           </a:solidFill>
           <a:ln/>
         </p:spPr>
+        <p:txBody>
+          <a:bodyPr/>
+          <a:lstStyle/>
+          <a:p>
+            <a:endParaRPr lang="es-ES"/>
+          </a:p>
+        </p:txBody>
       </p:sp>
       <p:sp>
         <p:nvSpPr>
@@ -7210,6 +7622,13 @@
             </a:outerShdw>
           </a:effectLst>
         </p:spPr>
+        <p:txBody>
+          <a:bodyPr/>
+          <a:lstStyle/>
+          <a:p>
+            <a:endParaRPr lang="es-ES"/>
+          </a:p>
+        </p:txBody>
       </p:sp>
       <p:sp>
         <p:nvSpPr>
@@ -7230,6 +7649,13 @@
           </a:solidFill>
           <a:ln/>
         </p:spPr>
+        <p:txBody>
+          <a:bodyPr/>
+          <a:lstStyle/>
+          <a:p>
+            <a:endParaRPr lang="es-ES"/>
+          </a:p>
+        </p:txBody>
       </p:sp>
       <p:sp>
         <p:nvSpPr>
@@ -7370,6 +7796,13 @@
             </a:outerShdw>
           </a:effectLst>
         </p:spPr>
+        <p:txBody>
+          <a:bodyPr/>
+          <a:lstStyle/>
+          <a:p>
+            <a:endParaRPr lang="es-ES"/>
+          </a:p>
+        </p:txBody>
       </p:sp>
       <p:sp>
         <p:nvSpPr>
@@ -7390,6 +7823,13 @@
           </a:solidFill>
           <a:ln/>
         </p:spPr>
+        <p:txBody>
+          <a:bodyPr/>
+          <a:lstStyle/>
+          <a:p>
+            <a:endParaRPr lang="es-ES"/>
+          </a:p>
+        </p:txBody>
       </p:sp>
       <p:sp>
         <p:nvSpPr>
@@ -7530,6 +7970,13 @@
             </a:outerShdw>
           </a:effectLst>
         </p:spPr>
+        <p:txBody>
+          <a:bodyPr/>
+          <a:lstStyle/>
+          <a:p>
+            <a:endParaRPr lang="es-ES"/>
+          </a:p>
+        </p:txBody>
       </p:sp>
       <p:sp>
         <p:nvSpPr>
@@ -7550,6 +7997,13 @@
           </a:solidFill>
           <a:ln/>
         </p:spPr>
+        <p:txBody>
+          <a:bodyPr/>
+          <a:lstStyle/>
+          <a:p>
+            <a:endParaRPr lang="es-ES"/>
+          </a:p>
+        </p:txBody>
       </p:sp>
       <p:sp>
         <p:nvSpPr>
@@ -7711,6 +8165,13 @@
           </a:solidFill>
           <a:ln/>
         </p:spPr>
+        <p:txBody>
+          <a:bodyPr/>
+          <a:lstStyle/>
+          <a:p>
+            <a:endParaRPr lang="es-ES"/>
+          </a:p>
+        </p:txBody>
       </p:sp>
       <p:sp>
         <p:nvSpPr>
@@ -7767,6 +8228,13 @@
           </a:solidFill>
           <a:ln/>
         </p:spPr>
+        <p:txBody>
+          <a:bodyPr/>
+          <a:lstStyle/>
+          <a:p>
+            <a:endParaRPr lang="es-ES"/>
+          </a:p>
+        </p:txBody>
       </p:sp>
       <p:sp>
         <p:nvSpPr>
@@ -7792,6 +8260,13 @@
             <a:prstDash val="solid"/>
           </a:ln>
         </p:spPr>
+        <p:txBody>
+          <a:bodyPr/>
+          <a:lstStyle/>
+          <a:p>
+            <a:endParaRPr lang="es-ES"/>
+          </a:p>
+        </p:txBody>
       </p:sp>
       <p:sp>
         <p:nvSpPr>
@@ -7860,6 +8335,13 @@
             </a:outerShdw>
           </a:effectLst>
         </p:spPr>
+        <p:txBody>
+          <a:bodyPr/>
+          <a:lstStyle/>
+          <a:p>
+            <a:endParaRPr lang="es-ES"/>
+          </a:p>
+        </p:txBody>
       </p:sp>
       <p:sp>
         <p:nvSpPr>
@@ -7957,6 +8439,13 @@
             <a:prstDash val="solid"/>
           </a:ln>
         </p:spPr>
+        <p:txBody>
+          <a:bodyPr/>
+          <a:lstStyle/>
+          <a:p>
+            <a:endParaRPr lang="es-ES"/>
+          </a:p>
+        </p:txBody>
       </p:sp>
       <p:sp>
         <p:nvSpPr>
@@ -8025,6 +8514,13 @@
             </a:outerShdw>
           </a:effectLst>
         </p:spPr>
+        <p:txBody>
+          <a:bodyPr/>
+          <a:lstStyle/>
+          <a:p>
+            <a:endParaRPr lang="es-ES"/>
+          </a:p>
+        </p:txBody>
       </p:sp>
       <p:sp>
         <p:nvSpPr>
@@ -8122,6 +8618,13 @@
             <a:prstDash val="solid"/>
           </a:ln>
         </p:spPr>
+        <p:txBody>
+          <a:bodyPr/>
+          <a:lstStyle/>
+          <a:p>
+            <a:endParaRPr lang="es-ES"/>
+          </a:p>
+        </p:txBody>
       </p:sp>
       <p:sp>
         <p:nvSpPr>
@@ -8190,6 +8693,13 @@
             </a:outerShdw>
           </a:effectLst>
         </p:spPr>
+        <p:txBody>
+          <a:bodyPr/>
+          <a:lstStyle/>
+          <a:p>
+            <a:endParaRPr lang="es-ES"/>
+          </a:p>
+        </p:txBody>
       </p:sp>
       <p:sp>
         <p:nvSpPr>
@@ -8287,6 +8797,13 @@
             <a:prstDash val="solid"/>
           </a:ln>
         </p:spPr>
+        <p:txBody>
+          <a:bodyPr/>
+          <a:lstStyle/>
+          <a:p>
+            <a:endParaRPr lang="es-ES"/>
+          </a:p>
+        </p:txBody>
       </p:sp>
       <p:sp>
         <p:nvSpPr>
@@ -8355,6 +8872,13 @@
             </a:outerShdw>
           </a:effectLst>
         </p:spPr>
+        <p:txBody>
+          <a:bodyPr/>
+          <a:lstStyle/>
+          <a:p>
+            <a:endParaRPr lang="es-ES"/>
+          </a:p>
+        </p:txBody>
       </p:sp>
       <p:sp>
         <p:nvSpPr>
@@ -8452,6 +8976,13 @@
             <a:prstDash val="solid"/>
           </a:ln>
         </p:spPr>
+        <p:txBody>
+          <a:bodyPr/>
+          <a:lstStyle/>
+          <a:p>
+            <a:endParaRPr lang="es-ES"/>
+          </a:p>
+        </p:txBody>
       </p:sp>
       <p:sp>
         <p:nvSpPr>
@@ -8520,6 +9051,13 @@
             </a:outerShdw>
           </a:effectLst>
         </p:spPr>
+        <p:txBody>
+          <a:bodyPr/>
+          <a:lstStyle/>
+          <a:p>
+            <a:endParaRPr lang="es-ES"/>
+          </a:p>
+        </p:txBody>
       </p:sp>
       <p:sp>
         <p:nvSpPr>
@@ -8645,6 +9183,13 @@
           </a:solidFill>
           <a:ln/>
         </p:spPr>
+        <p:txBody>
+          <a:bodyPr/>
+          <a:lstStyle/>
+          <a:p>
+            <a:endParaRPr lang="es-ES"/>
+          </a:p>
+        </p:txBody>
       </p:sp>
       <p:sp>
         <p:nvSpPr>
@@ -8701,6 +9246,13 @@
           </a:solidFill>
           <a:ln/>
         </p:spPr>
+        <p:txBody>
+          <a:bodyPr/>
+          <a:lstStyle/>
+          <a:p>
+            <a:endParaRPr lang="es-ES"/>
+          </a:p>
+        </p:txBody>
       </p:sp>
       <p:sp>
         <p:nvSpPr>
@@ -8757,6 +9309,13 @@
           </a:solidFill>
           <a:ln/>
         </p:spPr>
+        <p:txBody>
+          <a:bodyPr/>
+          <a:lstStyle/>
+          <a:p>
+            <a:endParaRPr lang="es-ES"/>
+          </a:p>
+        </p:txBody>
       </p:sp>
       <p:sp>
         <p:nvSpPr>
@@ -8813,6 +9372,13 @@
           </a:solidFill>
           <a:ln/>
         </p:spPr>
+        <p:txBody>
+          <a:bodyPr/>
+          <a:lstStyle/>
+          <a:p>
+            <a:endParaRPr lang="es-ES"/>
+          </a:p>
+        </p:txBody>
       </p:sp>
       <p:sp>
         <p:nvSpPr>
@@ -8877,6 +9443,13 @@
           </a:solidFill>
           <a:ln/>
         </p:spPr>
+        <p:txBody>
+          <a:bodyPr/>
+          <a:lstStyle/>
+          <a:p>
+            <a:endParaRPr lang="es-ES"/>
+          </a:p>
+        </p:txBody>
       </p:sp>
       <p:sp>
         <p:nvSpPr>
@@ -8933,6 +9506,13 @@
           </a:solidFill>
           <a:ln/>
         </p:spPr>
+        <p:txBody>
+          <a:bodyPr/>
+          <a:lstStyle/>
+          <a:p>
+            <a:endParaRPr lang="es-ES"/>
+          </a:p>
+        </p:txBody>
       </p:sp>
       <p:sp>
         <p:nvSpPr>
